--- a/media/resources/files/ButunSandardyJanaOnduktardyKoboytuuBoluu-10-100-1000-1234_5UOZqGK.pptx
+++ b/media/resources/files/ButunSandardyJanaOnduktardyKoboytuuBoluu-10-100-1000-1234_5UOZqGK.pptx
@@ -4310,7 +4310,7 @@
                 <a:ea typeface="+mn-ea"/>
                 <a:cs typeface="+mn-cs"/>
               </a:rPr>
-              <a:t>Турдуу пикирлер учун ыраазычылык билдиребиз.</a:t>
+              <a:t>Түрдүү пикирлер үчүн ыраазычылык билдиребиз.</a:t>
             </a:r>
           </a:p>
           <a:p>

--- a/media/resources/files/ButunSandardyJanaOnduktardyKoboytuuBoluu-10-100-1000-1234_5UOZqGK.pptx
+++ b/media/resources/files/ButunSandardyJanaOnduktardyKoboytuuBoluu-10-100-1000-1234_5UOZqGK.pptx
@@ -2060,7 +2060,7 @@
             <a:pPr algn="ctr"/>
             <a:r>
               <a:rPr lang="en-GB" sz="2000" dirty="0"/>
-              <a:t>4.5 × 1000 = </a:t>
+              <a:t>4,5 × 1000 = </a:t>
             </a:r>
           </a:p>
         </p:txBody>
@@ -2204,7 +2204,7 @@
             <a:pPr algn="ctr"/>
             <a:r>
               <a:rPr lang="en-GB" sz="2000" dirty="0"/>
-              <a:t>0.203 × three thousand = </a:t>
+              <a:t>0,203 × three thousand = </a:t>
             </a:r>
           </a:p>
         </p:txBody>
@@ -2240,7 +2240,7 @@
             <a:pPr algn="ctr"/>
             <a:r>
               <a:rPr lang="en-GB" sz="2000" dirty="0"/>
-              <a:t>400.8 ÷ four hundred thousand = </a:t>
+              <a:t>400,8 ÷ four hundred thousand = </a:t>
             </a:r>
           </a:p>
         </p:txBody>
@@ -2276,7 +2276,7 @@
             <a:pPr algn="ctr"/>
             <a:r>
               <a:rPr lang="en-GB" sz="2000" dirty="0"/>
-              <a:t>0.0703 ÷ 100 × 10000 ÷ 10 = </a:t>
+              <a:t>0,0703 ÷ 100 × 10000 ÷ 10 = </a:t>
             </a:r>
           </a:p>
         </p:txBody>
@@ -2312,7 +2312,7 @@
             <a:pPr algn="ctr"/>
             <a:r>
               <a:rPr lang="en-GB" sz="2000" dirty="0"/>
-              <a:t>6.28 × 1000 =                     ÷ 100  </a:t>
+              <a:t>6,28 × 1000 =                     ÷ 100  </a:t>
             </a:r>
           </a:p>
         </p:txBody>
@@ -2932,7 +2932,7 @@
             <a:pPr algn="ctr"/>
             <a:r>
               <a:rPr lang="en-GB" sz="2000" dirty="0"/>
-              <a:t>4.5 × 1000 = </a:t>
+              <a:t>4,5 × 1000 = </a:t>
             </a:r>
           </a:p>
         </p:txBody>
@@ -3058,7 +3058,7 @@
             <a:pPr algn="just"/>
             <a:r>
               <a:rPr lang="en-GB" sz="2000" dirty="0"/>
-              <a:t>1.08</a:t>
+              <a:t>1,08</a:t>
             </a:r>
           </a:p>
         </p:txBody>
@@ -3166,7 +3166,7 @@
             <a:pPr algn="ctr"/>
             <a:r>
               <a:rPr lang="en-GB" sz="2000" dirty="0"/>
-              <a:t>0.203 × three thousand = </a:t>
+              <a:t>0,203 × three thousand = </a:t>
             </a:r>
           </a:p>
         </p:txBody>
@@ -3247,7 +3247,7 @@
             <a:pPr algn="ctr"/>
             <a:r>
               <a:rPr lang="en-GB" sz="2000" dirty="0"/>
-              <a:t>400.8 ÷ four hundred thousand = </a:t>
+              <a:t>400,8 ÷ four hundred thousand = </a:t>
             </a:r>
           </a:p>
         </p:txBody>
@@ -3292,7 +3292,7 @@
             <a:pPr algn="just"/>
             <a:r>
               <a:rPr lang="en-GB" sz="2000" dirty="0"/>
-              <a:t>0.001002</a:t>
+              <a:t>0,001002</a:t>
             </a:r>
           </a:p>
         </p:txBody>
@@ -3328,7 +3328,7 @@
             <a:pPr algn="ctr"/>
             <a:r>
               <a:rPr lang="en-GB" sz="2000" dirty="0"/>
-              <a:t>0.0703 ÷ 100 × 10000 ÷ 10 = </a:t>
+              <a:t>0,0703 ÷ 100 × 10000 ÷ 10 = </a:t>
             </a:r>
           </a:p>
         </p:txBody>
@@ -3373,7 +3373,7 @@
             <a:pPr algn="just"/>
             <a:r>
               <a:rPr lang="en-GB" sz="2000" dirty="0"/>
-              <a:t>0.703</a:t>
+              <a:t>0,703</a:t>
             </a:r>
           </a:p>
         </p:txBody>
@@ -3409,7 +3409,7 @@
             <a:pPr algn="ctr"/>
             <a:r>
               <a:rPr lang="en-GB" sz="2000" dirty="0"/>
-              <a:t>6.28 × 1000 =                     ÷ 100  </a:t>
+              <a:t>6,28 × 1000 =                     ÷ 100  </a:t>
             </a:r>
           </a:p>
         </p:txBody>

--- a/media/resources/files/ButunSandardyJanaOnduktardyKoboytuuBoluu-10-100-1000-1234_5UOZqGK.pptx
+++ b/media/resources/files/ButunSandardyJanaOnduktardyKoboytuuBoluu-10-100-1000-1234_5UOZqGK.pptx
@@ -2276,7 +2276,7 @@
             <a:pPr algn="ctr"/>
             <a:r>
               <a:rPr lang="en-GB" sz="2000" dirty="0"/>
-              <a:t>0,0703 ÷ 100 × 10000 ÷ 10 = </a:t>
+              <a:t>0,0703 ÷ 100 × 10 000 ÷ 10 = </a:t>
             </a:r>
           </a:p>
         </p:txBody>
@@ -3292,7 +3292,7 @@
             <a:pPr algn="just"/>
             <a:r>
               <a:rPr lang="en-GB" sz="2000" dirty="0"/>
-              <a:t>0,001002</a:t>
+              <a:t>0,001 002</a:t>
             </a:r>
           </a:p>
         </p:txBody>
@@ -3328,7 +3328,7 @@
             <a:pPr algn="ctr"/>
             <a:r>
               <a:rPr lang="en-GB" sz="2000" dirty="0"/>
-              <a:t>0,0703 ÷ 100 × 10000 ÷ 10 = </a:t>
+              <a:t>0,0703 ÷ 100 × 10 000 ÷ 10 = </a:t>
             </a:r>
           </a:p>
         </p:txBody>
